--- a/10-Knowledge-Products/KP1-GEA/videos/module_3/en/decks/KP1_M3_Deck_v0.1.pptx
+++ b/10-Knowledge-Products/KP1-GEA/videos/module_3/en/decks/KP1_M3_Deck_v0.1.pptx
@@ -2953,7 +2953,7 @@
           <a:p/>
           <a:p>
             <a:r>
-              <a:t>Centrepiece of 3.5 — reveal one question at a time, then hold the full list on screen.</a:t>
+              <a:t>Centrepiece of 3.5 — the gate drawn as one mechanism: proposal → the five questions → the Board rules → pass, or a time-boxed exception → the decision log. Reveal one question at a time, then hold the full flow on screen; the exception and log branches are what the next slides walk through.</a:t>
             </a:r>
           </a:p>
         </p:txBody>
@@ -24054,14 +24054,169 @@
       </p:sp>
       <p:sp>
         <p:nvSpPr>
-          <p:cNvPr id="4" name="Oval 3"/>
+          <p:cNvPr id="4" name="Rounded Rectangle 3"/>
           <p:cNvSpPr/>
           <p:nvPr/>
         </p:nvSpPr>
         <p:spPr>
           <a:xfrm>
-            <a:off x="621792" y="1463040"/>
-            <a:ext cx="310896" cy="310896"/>
+            <a:off x="658368" y="2926080"/>
+            <a:ext cx="1600200" cy="1280160"/>
+          </a:xfrm>
+          <a:prstGeom prst="roundRect">
+            <a:avLst>
+              <a:gd name="adj" fmla="val 8000"/>
+            </a:avLst>
+          </a:prstGeom>
+          <a:solidFill>
+            <a:srgbClr val="F2F2F2"/>
+          </a:solidFill>
+          <a:ln>
+            <a:noFill/>
+          </a:ln>
+          <a:effectLst/>
+        </p:spPr>
+        <p:style>
+          <a:lnRef idx="1">
+            <a:schemeClr val="accent1"/>
+          </a:lnRef>
+          <a:fillRef idx="3">
+            <a:schemeClr val="accent1"/>
+          </a:fillRef>
+          <a:effectRef idx="2">
+            <a:schemeClr val="accent1"/>
+          </a:effectRef>
+          <a:fontRef idx="minor">
+            <a:schemeClr val="lt1"/>
+          </a:fontRef>
+        </p:style>
+        <p:txBody>
+          <a:bodyPr rtlCol="0" anchor="ctr" lIns="128016" rIns="128016" tIns="91440" bIns="54864" wrap="square"/>
+          <a:lstStyle/>
+          <a:p>
+            <a:pPr algn="l">
+              <a:spcAft>
+                <a:spcPts val="300"/>
+              </a:spcAft>
+            </a:pPr>
+            <a:r>
+              <a:rPr sz="1300" b="1" i="0">
+                <a:solidFill>
+                  <a:srgbClr val="006E96"/>
+                </a:solidFill>
+                <a:latin typeface="Arial"/>
+              </a:rPr>
+              <a:t>A project proposal</a:t>
+            </a:r>
+          </a:p>
+          <a:p>
+            <a:pPr algn="l">
+              <a:spcAft>
+                <a:spcPts val="300"/>
+              </a:spcAft>
+            </a:pPr>
+            <a:r>
+              <a:rPr sz="1250" b="0" i="0">
+                <a:solidFill>
+                  <a:srgbClr val="1A1A1A"/>
+                </a:solidFill>
+                <a:latin typeface="Arial"/>
+              </a:rPr>
+              <a:t>before funding</a:t>
+            </a:r>
+          </a:p>
+        </p:txBody>
+      </p:sp>
+      <p:sp>
+        <p:nvSpPr>
+          <p:cNvPr id="5" name="Rounded Rectangle 4"/>
+          <p:cNvSpPr/>
+          <p:nvPr/>
+        </p:nvSpPr>
+        <p:spPr>
+          <a:xfrm>
+            <a:off x="2697480" y="1600200"/>
+            <a:ext cx="4160520" cy="3931920"/>
+          </a:xfrm>
+          <a:prstGeom prst="roundRect">
+            <a:avLst>
+              <a:gd name="adj" fmla="val 5000"/>
+            </a:avLst>
+          </a:prstGeom>
+          <a:solidFill>
+            <a:srgbClr val="E5F5FB"/>
+          </a:solidFill>
+          <a:ln>
+            <a:noFill/>
+          </a:ln>
+          <a:effectLst/>
+        </p:spPr>
+        <p:style>
+          <a:lnRef idx="1">
+            <a:schemeClr val="accent1"/>
+          </a:lnRef>
+          <a:fillRef idx="3">
+            <a:schemeClr val="accent1"/>
+          </a:fillRef>
+          <a:effectRef idx="2">
+            <a:schemeClr val="accent1"/>
+          </a:effectRef>
+          <a:fontRef idx="minor">
+            <a:schemeClr val="lt1"/>
+          </a:fontRef>
+        </p:style>
+        <p:txBody>
+          <a:bodyPr rtlCol="0" anchor="ctr"/>
+          <a:lstStyle/>
+          <a:p>
+            <a:pPr algn="ctr"/>
+          </a:p>
+        </p:txBody>
+      </p:sp>
+      <p:sp>
+        <p:nvSpPr>
+          <p:cNvPr id="6" name="TextBox 5"/>
+          <p:cNvSpPr txBox="1"/>
+          <p:nvPr/>
+        </p:nvSpPr>
+        <p:spPr>
+          <a:xfrm>
+            <a:off x="2880360" y="1691640"/>
+            <a:ext cx="3794759" cy="320040"/>
+          </a:xfrm>
+          <a:prstGeom prst="rect">
+            <a:avLst/>
+          </a:prstGeom>
+          <a:noFill/>
+        </p:spPr>
+        <p:txBody>
+          <a:bodyPr wrap="square">
+            <a:spAutoFit/>
+          </a:bodyPr>
+          <a:lstStyle/>
+          <a:p>
+            <a:r>
+              <a:rPr sz="1050" b="1" i="0">
+                <a:solidFill>
+                  <a:srgbClr val="006E96"/>
+                </a:solidFill>
+                <a:latin typeface="Arial"/>
+              </a:rPr>
+              <a:t>THE GATE — THE SAME QUESTIONS, EVERY TIME</a:t>
+            </a:r>
+          </a:p>
+        </p:txBody>
+      </p:sp>
+      <p:sp>
+        <p:nvSpPr>
+          <p:cNvPr id="7" name="Oval 6"/>
+          <p:cNvSpPr/>
+          <p:nvPr/>
+        </p:nvSpPr>
+        <p:spPr>
+          <a:xfrm>
+            <a:off x="2880360" y="2139696"/>
+            <a:ext cx="274320" cy="274320"/>
           </a:xfrm>
           <a:prstGeom prst="ellipse">
             <a:avLst/>
@@ -24107,14 +24262,14 @@
       </p:sp>
       <p:sp>
         <p:nvSpPr>
-          <p:cNvPr id="5" name="TextBox 4"/>
+          <p:cNvPr id="8" name="TextBox 7"/>
           <p:cNvSpPr txBox="1"/>
           <p:nvPr/>
         </p:nvSpPr>
         <p:spPr>
           <a:xfrm>
-            <a:off x="1115568" y="1417320"/>
-            <a:ext cx="10527487" cy="804672"/>
+            <a:off x="3246120" y="2084831"/>
+            <a:ext cx="3474720" cy="667512"/>
           </a:xfrm>
           <a:prstGeom prst="rect">
             <a:avLst/>
@@ -24127,13 +24282,8 @@
           </a:bodyPr>
           <a:lstStyle/>
           <a:p>
-            <a:pPr>
-              <a:spcAft>
-                <a:spcPts val="300"/>
-              </a:spcAft>
-            </a:pPr>
-            <a:r>
-              <a:rPr sz="1800" b="1" i="0">
+            <a:r>
+              <a:rPr sz="1250" b="0" i="0">
                 <a:solidFill>
                   <a:srgbClr val="1A1A1A"/>
                 </a:solidFill>
@@ -24146,58 +24296,14 @@
       </p:sp>
       <p:sp>
         <p:nvSpPr>
-          <p:cNvPr id="6" name="Rectangle 5"/>
+          <p:cNvPr id="9" name="Oval 8"/>
           <p:cNvSpPr/>
           <p:nvPr/>
         </p:nvSpPr>
         <p:spPr>
           <a:xfrm>
-            <a:off x="621792" y="2226564"/>
-            <a:ext cx="10881360" cy="12700"/>
-          </a:xfrm>
-          <a:prstGeom prst="rect">
-            <a:avLst/>
-          </a:prstGeom>
-          <a:solidFill>
-            <a:srgbClr val="DDECF4"/>
-          </a:solidFill>
-          <a:ln>
-            <a:noFill/>
-          </a:ln>
-          <a:effectLst/>
-        </p:spPr>
-        <p:style>
-          <a:lnRef idx="1">
-            <a:schemeClr val="accent1"/>
-          </a:lnRef>
-          <a:fillRef idx="3">
-            <a:schemeClr val="accent1"/>
-          </a:fillRef>
-          <a:effectRef idx="2">
-            <a:schemeClr val="accent1"/>
-          </a:effectRef>
-          <a:fontRef idx="minor">
-            <a:schemeClr val="lt1"/>
-          </a:fontRef>
-        </p:style>
-        <p:txBody>
-          <a:bodyPr rtlCol="0" anchor="ctr"/>
-          <a:lstStyle/>
-          <a:p>
-            <a:pPr algn="ctr"/>
-          </a:p>
-        </p:txBody>
-      </p:sp>
-      <p:sp>
-        <p:nvSpPr>
-          <p:cNvPr id="7" name="Oval 6"/>
-          <p:cNvSpPr/>
-          <p:nvPr/>
-        </p:nvSpPr>
-        <p:spPr>
-          <a:xfrm>
-            <a:off x="621792" y="2313432"/>
-            <a:ext cx="310896" cy="310896"/>
+            <a:off x="2880360" y="2807208"/>
+            <a:ext cx="274320" cy="274320"/>
           </a:xfrm>
           <a:prstGeom prst="ellipse">
             <a:avLst/>
@@ -24243,14 +24349,14 @@
       </p:sp>
       <p:sp>
         <p:nvSpPr>
-          <p:cNvPr id="8" name="TextBox 7"/>
+          <p:cNvPr id="10" name="TextBox 9"/>
           <p:cNvSpPr txBox="1"/>
           <p:nvPr/>
         </p:nvSpPr>
         <p:spPr>
           <a:xfrm>
-            <a:off x="1115568" y="2267712"/>
-            <a:ext cx="10527487" cy="804672"/>
+            <a:off x="3246120" y="2752344"/>
+            <a:ext cx="3474720" cy="667512"/>
           </a:xfrm>
           <a:prstGeom prst="rect">
             <a:avLst/>
@@ -24263,13 +24369,8 @@
           </a:bodyPr>
           <a:lstStyle/>
           <a:p>
-            <a:pPr>
-              <a:spcAft>
-                <a:spcPts val="300"/>
-              </a:spcAft>
-            </a:pPr>
-            <a:r>
-              <a:rPr sz="1800" b="1" i="0">
+            <a:r>
+              <a:rPr sz="1250" b="0" i="0">
                 <a:solidFill>
                   <a:srgbClr val="1A1A1A"/>
                 </a:solidFill>
@@ -24282,58 +24383,14 @@
       </p:sp>
       <p:sp>
         <p:nvSpPr>
-          <p:cNvPr id="9" name="Rectangle 8"/>
+          <p:cNvPr id="11" name="Oval 10"/>
           <p:cNvSpPr/>
           <p:nvPr/>
         </p:nvSpPr>
         <p:spPr>
           <a:xfrm>
-            <a:off x="621792" y="3076956"/>
-            <a:ext cx="10881360" cy="12700"/>
-          </a:xfrm>
-          <a:prstGeom prst="rect">
-            <a:avLst/>
-          </a:prstGeom>
-          <a:solidFill>
-            <a:srgbClr val="DDECF4"/>
-          </a:solidFill>
-          <a:ln>
-            <a:noFill/>
-          </a:ln>
-          <a:effectLst/>
-        </p:spPr>
-        <p:style>
-          <a:lnRef idx="1">
-            <a:schemeClr val="accent1"/>
-          </a:lnRef>
-          <a:fillRef idx="3">
-            <a:schemeClr val="accent1"/>
-          </a:fillRef>
-          <a:effectRef idx="2">
-            <a:schemeClr val="accent1"/>
-          </a:effectRef>
-          <a:fontRef idx="minor">
-            <a:schemeClr val="lt1"/>
-          </a:fontRef>
-        </p:style>
-        <p:txBody>
-          <a:bodyPr rtlCol="0" anchor="ctr"/>
-          <a:lstStyle/>
-          <a:p>
-            <a:pPr algn="ctr"/>
-          </a:p>
-        </p:txBody>
-      </p:sp>
-      <p:sp>
-        <p:nvSpPr>
-          <p:cNvPr id="10" name="Oval 9"/>
-          <p:cNvSpPr/>
-          <p:nvPr/>
-        </p:nvSpPr>
-        <p:spPr>
-          <a:xfrm>
-            <a:off x="621792" y="3163824"/>
-            <a:ext cx="310896" cy="310896"/>
+            <a:off x="2880360" y="3474720"/>
+            <a:ext cx="274320" cy="274320"/>
           </a:xfrm>
           <a:prstGeom prst="ellipse">
             <a:avLst/>
@@ -24379,14 +24436,14 @@
       </p:sp>
       <p:sp>
         <p:nvSpPr>
-          <p:cNvPr id="11" name="TextBox 10"/>
+          <p:cNvPr id="12" name="TextBox 11"/>
           <p:cNvSpPr txBox="1"/>
           <p:nvPr/>
         </p:nvSpPr>
         <p:spPr>
           <a:xfrm>
-            <a:off x="1115568" y="3118104"/>
-            <a:ext cx="10527487" cy="804672"/>
+            <a:off x="3246120" y="3419856"/>
+            <a:ext cx="3474720" cy="667512"/>
           </a:xfrm>
           <a:prstGeom prst="rect">
             <a:avLst/>
@@ -24399,13 +24456,8 @@
           </a:bodyPr>
           <a:lstStyle/>
           <a:p>
-            <a:pPr>
-              <a:spcAft>
-                <a:spcPts val="300"/>
-              </a:spcAft>
-            </a:pPr>
-            <a:r>
-              <a:rPr sz="1800" b="1" i="0">
+            <a:r>
+              <a:rPr sz="1250" b="0" i="0">
                 <a:solidFill>
                   <a:srgbClr val="1A1A1A"/>
                 </a:solidFill>
@@ -24413,50 +24465,6 @@
               </a:rPr>
               <a:t>Do you meet the architecture principles — security by design, once-only, the rest?</a:t>
             </a:r>
-          </a:p>
-        </p:txBody>
-      </p:sp>
-      <p:sp>
-        <p:nvSpPr>
-          <p:cNvPr id="12" name="Rectangle 11"/>
-          <p:cNvSpPr/>
-          <p:nvPr/>
-        </p:nvSpPr>
-        <p:spPr>
-          <a:xfrm>
-            <a:off x="621792" y="3927348"/>
-            <a:ext cx="10881360" cy="12700"/>
-          </a:xfrm>
-          <a:prstGeom prst="rect">
-            <a:avLst/>
-          </a:prstGeom>
-          <a:solidFill>
-            <a:srgbClr val="DDECF4"/>
-          </a:solidFill>
-          <a:ln>
-            <a:noFill/>
-          </a:ln>
-          <a:effectLst/>
-        </p:spPr>
-        <p:style>
-          <a:lnRef idx="1">
-            <a:schemeClr val="accent1"/>
-          </a:lnRef>
-          <a:fillRef idx="3">
-            <a:schemeClr val="accent1"/>
-          </a:fillRef>
-          <a:effectRef idx="2">
-            <a:schemeClr val="accent1"/>
-          </a:effectRef>
-          <a:fontRef idx="minor">
-            <a:schemeClr val="lt1"/>
-          </a:fontRef>
-        </p:style>
-        <p:txBody>
-          <a:bodyPr rtlCol="0" anchor="ctr"/>
-          <a:lstStyle/>
-          <a:p>
-            <a:pPr algn="ctr"/>
           </a:p>
         </p:txBody>
       </p:sp>
@@ -24468,8 +24476,8 @@
         </p:nvSpPr>
         <p:spPr>
           <a:xfrm>
-            <a:off x="621792" y="4014215"/>
-            <a:ext cx="310896" cy="310896"/>
+            <a:off x="2880360" y="4142232"/>
+            <a:ext cx="274320" cy="274320"/>
           </a:xfrm>
           <a:prstGeom prst="ellipse">
             <a:avLst/>
@@ -24521,8 +24529,8 @@
         </p:nvSpPr>
         <p:spPr>
           <a:xfrm>
-            <a:off x="1115568" y="3968496"/>
-            <a:ext cx="10527487" cy="804672"/>
+            <a:off x="3246120" y="4087368"/>
+            <a:ext cx="3474720" cy="667512"/>
           </a:xfrm>
           <a:prstGeom prst="rect">
             <a:avLst/>
@@ -24535,13 +24543,8 @@
           </a:bodyPr>
           <a:lstStyle/>
           <a:p>
-            <a:pPr>
-              <a:spcAft>
-                <a:spcPts val="300"/>
-              </a:spcAft>
-            </a:pPr>
-            <a:r>
-              <a:rPr sz="1800" b="1" i="0">
+            <a:r>
+              <a:rPr sz="1250" b="0" i="0">
                 <a:solidFill>
                   <a:srgbClr val="1A1A1A"/>
                 </a:solidFill>
@@ -24554,58 +24557,14 @@
       </p:sp>
       <p:sp>
         <p:nvSpPr>
-          <p:cNvPr id="15" name="Rectangle 14"/>
+          <p:cNvPr id="15" name="Oval 14"/>
           <p:cNvSpPr/>
           <p:nvPr/>
         </p:nvSpPr>
         <p:spPr>
           <a:xfrm>
-            <a:off x="621792" y="4777740"/>
-            <a:ext cx="10881360" cy="12700"/>
-          </a:xfrm>
-          <a:prstGeom prst="rect">
-            <a:avLst/>
-          </a:prstGeom>
-          <a:solidFill>
-            <a:srgbClr val="DDECF4"/>
-          </a:solidFill>
-          <a:ln>
-            <a:noFill/>
-          </a:ln>
-          <a:effectLst/>
-        </p:spPr>
-        <p:style>
-          <a:lnRef idx="1">
-            <a:schemeClr val="accent1"/>
-          </a:lnRef>
-          <a:fillRef idx="3">
-            <a:schemeClr val="accent1"/>
-          </a:fillRef>
-          <a:effectRef idx="2">
-            <a:schemeClr val="accent1"/>
-          </a:effectRef>
-          <a:fontRef idx="minor">
-            <a:schemeClr val="lt1"/>
-          </a:fontRef>
-        </p:style>
-        <p:txBody>
-          <a:bodyPr rtlCol="0" anchor="ctr"/>
-          <a:lstStyle/>
-          <a:p>
-            <a:pPr algn="ctr"/>
-          </a:p>
-        </p:txBody>
-      </p:sp>
-      <p:sp>
-        <p:nvSpPr>
-          <p:cNvPr id="16" name="Oval 15"/>
-          <p:cNvSpPr/>
-          <p:nvPr/>
-        </p:nvSpPr>
-        <p:spPr>
-          <a:xfrm>
-            <a:off x="621792" y="4864608"/>
-            <a:ext cx="310896" cy="310896"/>
+            <a:off x="2880360" y="4809744"/>
+            <a:ext cx="274320" cy="274320"/>
           </a:xfrm>
           <a:prstGeom prst="ellipse">
             <a:avLst/>
@@ -24651,14 +24610,14 @@
       </p:sp>
       <p:sp>
         <p:nvSpPr>
-          <p:cNvPr id="17" name="TextBox 16"/>
+          <p:cNvPr id="16" name="TextBox 15"/>
           <p:cNvSpPr txBox="1"/>
           <p:nvPr/>
         </p:nvSpPr>
         <p:spPr>
           <a:xfrm>
-            <a:off x="1115568" y="4818888"/>
-            <a:ext cx="10527487" cy="804672"/>
+            <a:off x="3246120" y="4754880"/>
+            <a:ext cx="3474720" cy="667512"/>
           </a:xfrm>
           <a:prstGeom prst="rect">
             <a:avLst/>
@@ -24671,32 +24630,533 @@
           </a:bodyPr>
           <a:lstStyle/>
           <a:p>
-            <a:pPr>
+            <a:r>
+              <a:rPr sz="1250" b="0" i="0">
+                <a:solidFill>
+                  <a:srgbClr val="1A1A1A"/>
+                </a:solidFill>
+                <a:latin typeface="Arial"/>
+              </a:rPr>
+              <a:t>Can you export your data in an open format?</a:t>
+            </a:r>
+          </a:p>
+        </p:txBody>
+      </p:sp>
+      <p:cxnSp>
+        <p:nvCxnSpPr>
+          <p:cNvPr id="17" name="Connector 16"/>
+          <p:cNvCxnSpPr/>
+          <p:nvPr/>
+        </p:nvCxnSpPr>
+        <p:spPr>
+          <a:xfrm>
+            <a:off x="2258568" y="3566160"/>
+            <a:ext cx="438912" cy="0"/>
+          </a:xfrm>
+          <a:prstGeom prst="line">
+            <a:avLst/>
+          </a:prstGeom>
+          <a:ln w="19050">
+            <a:solidFill>
+              <a:srgbClr val="006E96"/>
+            </a:solidFill>
+            <a:tailEnd type="triangle" w="med" len="med"/>
+          </a:ln>
+        </p:spPr>
+        <p:style>
+          <a:lnRef idx="2">
+            <a:schemeClr val="accent1"/>
+          </a:lnRef>
+          <a:fillRef idx="0">
+            <a:schemeClr val="accent1"/>
+          </a:fillRef>
+          <a:effectRef idx="1">
+            <a:schemeClr val="accent1"/>
+          </a:effectRef>
+          <a:fontRef idx="minor">
+            <a:schemeClr val="tx1"/>
+          </a:fontRef>
+        </p:style>
+      </p:cxnSp>
+      <p:sp>
+        <p:nvSpPr>
+          <p:cNvPr id="18" name="Diamond 17"/>
+          <p:cNvSpPr/>
+          <p:nvPr/>
+        </p:nvSpPr>
+        <p:spPr>
+          <a:xfrm>
+            <a:off x="7223760" y="2880360"/>
+            <a:ext cx="1234440" cy="1371600"/>
+          </a:xfrm>
+          <a:prstGeom prst="diamond">
+            <a:avLst/>
+          </a:prstGeom>
+          <a:solidFill>
+            <a:srgbClr val="006E96"/>
+          </a:solidFill>
+          <a:ln>
+            <a:noFill/>
+          </a:ln>
+          <a:effectLst/>
+        </p:spPr>
+        <p:style>
+          <a:lnRef idx="1">
+            <a:schemeClr val="accent1"/>
+          </a:lnRef>
+          <a:fillRef idx="3">
+            <a:schemeClr val="accent1"/>
+          </a:fillRef>
+          <a:effectRef idx="2">
+            <a:schemeClr val="accent1"/>
+          </a:effectRef>
+          <a:fontRef idx="minor">
+            <a:schemeClr val="lt1"/>
+          </a:fontRef>
+        </p:style>
+        <p:txBody>
+          <a:bodyPr rtlCol="0" anchor="ctr" lIns="0" rIns="0" wrap="square"/>
+          <a:lstStyle/>
+          <a:p>
+            <a:pPr algn="ctr"/>
+            <a:r>
+              <a:rPr sz="1100" b="1" i="0">
+                <a:solidFill>
+                  <a:srgbClr val="FFFFFF"/>
+                </a:solidFill>
+                <a:latin typeface="Arial"/>
+              </a:rPr>
+              <a:t>The Board</a:t>
+            </a:r>
+          </a:p>
+          <a:p>
+            <a:pPr algn="ctr"/>
+            <a:r>
+              <a:rPr sz="1100" b="1" i="0">
+                <a:solidFill>
+                  <a:srgbClr val="FFFFFF"/>
+                </a:solidFill>
+                <a:latin typeface="Arial"/>
+              </a:rPr>
+              <a:t>rules</a:t>
+            </a:r>
+          </a:p>
+        </p:txBody>
+      </p:sp>
+      <p:cxnSp>
+        <p:nvCxnSpPr>
+          <p:cNvPr id="19" name="Connector 18"/>
+          <p:cNvCxnSpPr/>
+          <p:nvPr/>
+        </p:nvCxnSpPr>
+        <p:spPr>
+          <a:xfrm>
+            <a:off x="6858000" y="3566160"/>
+            <a:ext cx="365760" cy="0"/>
+          </a:xfrm>
+          <a:prstGeom prst="line">
+            <a:avLst/>
+          </a:prstGeom>
+          <a:ln w="19050">
+            <a:solidFill>
+              <a:srgbClr val="006E96"/>
+            </a:solidFill>
+            <a:tailEnd type="triangle" w="med" len="med"/>
+          </a:ln>
+        </p:spPr>
+        <p:style>
+          <a:lnRef idx="2">
+            <a:schemeClr val="accent1"/>
+          </a:lnRef>
+          <a:fillRef idx="0">
+            <a:schemeClr val="accent1"/>
+          </a:fillRef>
+          <a:effectRef idx="1">
+            <a:schemeClr val="accent1"/>
+          </a:effectRef>
+          <a:fontRef idx="minor">
+            <a:schemeClr val="tx1"/>
+          </a:fontRef>
+        </p:style>
+      </p:cxnSp>
+      <p:sp>
+        <p:nvSpPr>
+          <p:cNvPr id="20" name="Rounded Rectangle 19"/>
+          <p:cNvSpPr/>
+          <p:nvPr/>
+        </p:nvSpPr>
+        <p:spPr>
+          <a:xfrm>
+            <a:off x="8778240" y="1737360"/>
+            <a:ext cx="1417320" cy="1325880"/>
+          </a:xfrm>
+          <a:prstGeom prst="roundRect">
+            <a:avLst>
+              <a:gd name="adj" fmla="val 8000"/>
+            </a:avLst>
+          </a:prstGeom>
+          <a:solidFill>
+            <a:srgbClr val="E5F5FB"/>
+          </a:solidFill>
+          <a:ln>
+            <a:noFill/>
+          </a:ln>
+          <a:effectLst/>
+        </p:spPr>
+        <p:style>
+          <a:lnRef idx="1">
+            <a:schemeClr val="accent1"/>
+          </a:lnRef>
+          <a:fillRef idx="3">
+            <a:schemeClr val="accent1"/>
+          </a:fillRef>
+          <a:effectRef idx="2">
+            <a:schemeClr val="accent1"/>
+          </a:effectRef>
+          <a:fontRef idx="minor">
+            <a:schemeClr val="lt1"/>
+          </a:fontRef>
+        </p:style>
+        <p:txBody>
+          <a:bodyPr rtlCol="0" anchor="t" lIns="128016" rIns="128016" tIns="91440" bIns="54864" wrap="square"/>
+          <a:lstStyle/>
+          <a:p>
+            <a:pPr algn="l">
               <a:spcAft>
                 <a:spcPts val="300"/>
               </a:spcAft>
             </a:pPr>
             <a:r>
-              <a:rPr sz="1800" b="1" i="0">
+              <a:rPr sz="1200" b="1" i="0">
+                <a:solidFill>
+                  <a:srgbClr val="006E96"/>
+                </a:solidFill>
+                <a:latin typeface="Arial"/>
+              </a:rPr>
+              <a:t>PASS</a:t>
+            </a:r>
+          </a:p>
+          <a:p>
+            <a:pPr algn="l">
+              <a:spcAft>
+                <a:spcPts val="300"/>
+              </a:spcAft>
+            </a:pPr>
+            <a:r>
+              <a:rPr sz="1100" b="0" i="0">
                 <a:solidFill>
                   <a:srgbClr val="1A1A1A"/>
                 </a:solidFill>
                 <a:latin typeface="Arial"/>
               </a:rPr>
-              <a:t>Can you export your data in an open format?</a:t>
-            </a:r>
-          </a:p>
-        </p:txBody>
-      </p:sp>
-      <p:sp>
-        <p:nvSpPr>
-          <p:cNvPr id="18" name="TextBox 17"/>
+              <a:t>Funded — consume the shared blocks</a:t>
+            </a:r>
+          </a:p>
+        </p:txBody>
+      </p:sp>
+      <p:sp>
+        <p:nvSpPr>
+          <p:cNvPr id="21" name="Rounded Rectangle 20"/>
+          <p:cNvSpPr/>
+          <p:nvPr/>
+        </p:nvSpPr>
+        <p:spPr>
+          <a:xfrm>
+            <a:off x="8778240" y="4069079"/>
+            <a:ext cx="1417320" cy="1325880"/>
+          </a:xfrm>
+          <a:prstGeom prst="roundRect">
+            <a:avLst>
+              <a:gd name="adj" fmla="val 8000"/>
+            </a:avLst>
+          </a:prstGeom>
+          <a:solidFill>
+            <a:srgbClr val="F2F2F2"/>
+          </a:solidFill>
+          <a:ln>
+            <a:noFill/>
+          </a:ln>
+          <a:effectLst/>
+        </p:spPr>
+        <p:style>
+          <a:lnRef idx="1">
+            <a:schemeClr val="accent1"/>
+          </a:lnRef>
+          <a:fillRef idx="3">
+            <a:schemeClr val="accent1"/>
+          </a:fillRef>
+          <a:effectRef idx="2">
+            <a:schemeClr val="accent1"/>
+          </a:effectRef>
+          <a:fontRef idx="minor">
+            <a:schemeClr val="lt1"/>
+          </a:fontRef>
+        </p:style>
+        <p:txBody>
+          <a:bodyPr rtlCol="0" anchor="t" lIns="128016" rIns="128016" tIns="91440" bIns="54864" wrap="square"/>
+          <a:lstStyle/>
+          <a:p>
+            <a:pPr algn="l">
+              <a:spcAft>
+                <a:spcPts val="300"/>
+              </a:spcAft>
+            </a:pPr>
+            <a:r>
+              <a:rPr sz="1200" b="1" i="0">
+                <a:solidFill>
+                  <a:srgbClr val="006E96"/>
+                </a:solidFill>
+                <a:latin typeface="Arial"/>
+              </a:rPr>
+              <a:t>EXCEPTION</a:t>
+            </a:r>
+          </a:p>
+          <a:p>
+            <a:pPr algn="l">
+              <a:spcAft>
+                <a:spcPts val="300"/>
+              </a:spcAft>
+            </a:pPr>
+            <a:r>
+              <a:rPr sz="1100" b="0" i="0">
+                <a:solidFill>
+                  <a:srgbClr val="1A1A1A"/>
+                </a:solidFill>
+                <a:latin typeface="Arial"/>
+              </a:rPr>
+              <a:t>Granted in writing, with an expiry date and a reason</a:t>
+            </a:r>
+          </a:p>
+        </p:txBody>
+      </p:sp>
+      <p:cxnSp>
+        <p:nvCxnSpPr>
+          <p:cNvPr id="22" name="Connector 21"/>
+          <p:cNvCxnSpPr/>
+          <p:nvPr/>
+        </p:nvCxnSpPr>
+        <p:spPr>
+          <a:xfrm flipV="1">
+            <a:off x="8458200" y="2400300"/>
+            <a:ext cx="320040" cy="1165860"/>
+          </a:xfrm>
+          <a:prstGeom prst="line">
+            <a:avLst/>
+          </a:prstGeom>
+          <a:ln w="19050">
+            <a:solidFill>
+              <a:srgbClr val="006E96"/>
+            </a:solidFill>
+            <a:tailEnd type="triangle" w="med" len="med"/>
+          </a:ln>
+        </p:spPr>
+        <p:style>
+          <a:lnRef idx="2">
+            <a:schemeClr val="accent1"/>
+          </a:lnRef>
+          <a:fillRef idx="0">
+            <a:schemeClr val="accent1"/>
+          </a:fillRef>
+          <a:effectRef idx="1">
+            <a:schemeClr val="accent1"/>
+          </a:effectRef>
+          <a:fontRef idx="minor">
+            <a:schemeClr val="tx1"/>
+          </a:fontRef>
+        </p:style>
+      </p:cxnSp>
+      <p:cxnSp>
+        <p:nvCxnSpPr>
+          <p:cNvPr id="23" name="Connector 22"/>
+          <p:cNvCxnSpPr/>
+          <p:nvPr/>
+        </p:nvCxnSpPr>
+        <p:spPr>
+          <a:xfrm>
+            <a:off x="8458200" y="3566160"/>
+            <a:ext cx="320040" cy="1165860"/>
+          </a:xfrm>
+          <a:prstGeom prst="line">
+            <a:avLst/>
+          </a:prstGeom>
+          <a:ln w="19050">
+            <a:solidFill>
+              <a:srgbClr val="006E96"/>
+            </a:solidFill>
+            <a:tailEnd type="triangle" w="med" len="med"/>
+          </a:ln>
+        </p:spPr>
+        <p:style>
+          <a:lnRef idx="2">
+            <a:schemeClr val="accent1"/>
+          </a:lnRef>
+          <a:fillRef idx="0">
+            <a:schemeClr val="accent1"/>
+          </a:fillRef>
+          <a:effectRef idx="1">
+            <a:schemeClr val="accent1"/>
+          </a:effectRef>
+          <a:fontRef idx="minor">
+            <a:schemeClr val="tx1"/>
+          </a:fontRef>
+        </p:style>
+      </p:cxnSp>
+      <p:sp>
+        <p:nvSpPr>
+          <p:cNvPr id="24" name="Rounded Rectangle 23"/>
+          <p:cNvSpPr/>
+          <p:nvPr/>
+        </p:nvSpPr>
+        <p:spPr>
+          <a:xfrm>
+            <a:off x="10469880" y="2560320"/>
+            <a:ext cx="1069848" cy="2011680"/>
+          </a:xfrm>
+          <a:prstGeom prst="roundRect">
+            <a:avLst>
+              <a:gd name="adj" fmla="val 8000"/>
+            </a:avLst>
+          </a:prstGeom>
+          <a:solidFill>
+            <a:srgbClr val="006E96"/>
+          </a:solidFill>
+          <a:ln>
+            <a:noFill/>
+          </a:ln>
+          <a:effectLst/>
+        </p:spPr>
+        <p:style>
+          <a:lnRef idx="1">
+            <a:schemeClr val="accent1"/>
+          </a:lnRef>
+          <a:fillRef idx="3">
+            <a:schemeClr val="accent1"/>
+          </a:fillRef>
+          <a:effectRef idx="2">
+            <a:schemeClr val="accent1"/>
+          </a:effectRef>
+          <a:fontRef idx="minor">
+            <a:schemeClr val="lt1"/>
+          </a:fontRef>
+        </p:style>
+        <p:txBody>
+          <a:bodyPr rtlCol="0" anchor="t" lIns="128016" rIns="128016" tIns="91440" bIns="54864" wrap="square"/>
+          <a:lstStyle/>
+          <a:p>
+            <a:pPr algn="l">
+              <a:spcAft>
+                <a:spcPts val="300"/>
+              </a:spcAft>
+            </a:pPr>
+            <a:r>
+              <a:rPr sz="1100" b="1" i="0">
+                <a:solidFill>
+                  <a:srgbClr val="FFFFFF"/>
+                </a:solidFill>
+                <a:latin typeface="Arial"/>
+              </a:rPr>
+              <a:t>DECISION LOG</a:t>
+            </a:r>
+          </a:p>
+          <a:p>
+            <a:pPr algn="l">
+              <a:spcAft>
+                <a:spcPts val="300"/>
+              </a:spcAft>
+            </a:pPr>
+            <a:r>
+              <a:rPr sz="1050" b="0" i="0">
+                <a:solidFill>
+                  <a:srgbClr val="FFFFFF"/>
+                </a:solidFill>
+                <a:latin typeface="Arial"/>
+              </a:rPr>
+              <a:t>Every ruling and every exception, with its reason — into the repository</a:t>
+            </a:r>
+          </a:p>
+        </p:txBody>
+      </p:sp>
+      <p:cxnSp>
+        <p:nvCxnSpPr>
+          <p:cNvPr id="25" name="Connector 24"/>
+          <p:cNvCxnSpPr/>
+          <p:nvPr/>
+        </p:nvCxnSpPr>
+        <p:spPr>
+          <a:xfrm>
+            <a:off x="10195560" y="2400300"/>
+            <a:ext cx="274320" cy="800100"/>
+          </a:xfrm>
+          <a:prstGeom prst="line">
+            <a:avLst/>
+          </a:prstGeom>
+          <a:ln w="19050">
+            <a:solidFill>
+              <a:srgbClr val="006E96"/>
+            </a:solidFill>
+            <a:tailEnd type="triangle" w="med" len="med"/>
+          </a:ln>
+        </p:spPr>
+        <p:style>
+          <a:lnRef idx="2">
+            <a:schemeClr val="accent1"/>
+          </a:lnRef>
+          <a:fillRef idx="0">
+            <a:schemeClr val="accent1"/>
+          </a:fillRef>
+          <a:effectRef idx="1">
+            <a:schemeClr val="accent1"/>
+          </a:effectRef>
+          <a:fontRef idx="minor">
+            <a:schemeClr val="tx1"/>
+          </a:fontRef>
+        </p:style>
+      </p:cxnSp>
+      <p:cxnSp>
+        <p:nvCxnSpPr>
+          <p:cNvPr id="26" name="Connector 25"/>
+          <p:cNvCxnSpPr/>
+          <p:nvPr/>
+        </p:nvCxnSpPr>
+        <p:spPr>
+          <a:xfrm flipV="1">
+            <a:off x="10195560" y="3931920"/>
+            <a:ext cx="274320" cy="800100"/>
+          </a:xfrm>
+          <a:prstGeom prst="line">
+            <a:avLst/>
+          </a:prstGeom>
+          <a:ln w="19050">
+            <a:solidFill>
+              <a:srgbClr val="006E96"/>
+            </a:solidFill>
+            <a:tailEnd type="triangle" w="med" len="med"/>
+          </a:ln>
+        </p:spPr>
+        <p:style>
+          <a:lnRef idx="2">
+            <a:schemeClr val="accent1"/>
+          </a:lnRef>
+          <a:fillRef idx="0">
+            <a:schemeClr val="accent1"/>
+          </a:fillRef>
+          <a:effectRef idx="1">
+            <a:schemeClr val="accent1"/>
+          </a:effectRef>
+          <a:fontRef idx="minor">
+            <a:schemeClr val="tx1"/>
+          </a:fontRef>
+        </p:style>
+      </p:cxnSp>
+      <p:sp>
+        <p:nvSpPr>
+          <p:cNvPr id="27" name="TextBox 26"/>
           <p:cNvSpPr txBox="1"/>
           <p:nvPr/>
         </p:nvSpPr>
         <p:spPr>
           <a:xfrm>
-            <a:off x="658368" y="5779008"/>
+            <a:off x="658368" y="5760720"/>
             <a:ext cx="10881360" cy="548640"/>
           </a:xfrm>
           <a:prstGeom prst="rect">
@@ -24724,7 +25184,7 @@
       </p:sp>
       <p:sp>
         <p:nvSpPr>
-          <p:cNvPr id="19" name="TextBox 18"/>
+          <p:cNvPr id="28" name="TextBox 27"/>
           <p:cNvSpPr txBox="1"/>
           <p:nvPr/>
         </p:nvSpPr>
